--- a/Planning docs/Slides/lesson-15-3-teacher-slides.pptx
+++ b/Planning docs/Slides/lesson-15-3-teacher-slides.pptx
@@ -4986,7 +4986,7 @@
                 <a:ea typeface="Calibri" pitchFamily="34" charset="-122"/>
                 <a:cs typeface="Calibri" pitchFamily="34" charset="-120"/>
               </a:rPr>
-              <a:t>•  What do you notice on a second reading that you missed the first time?</a:t>
+              <a:t>•  Choose a scene to perform. Which scene do you want to read? Why is it important?</a:t>
             </a:r>
             <a:endParaRPr lang="en-US" sz="1500" dirty="0"/>
           </a:p>
@@ -5003,24 +5003,7 @@
                 <a:ea typeface="Calibri" pitchFamily="34" charset="-122"/>
                 <a:cs typeface="Calibri" pitchFamily="34" charset="-120"/>
               </a:rPr>
-              <a:t>•  How does knowing the ending change how you read the beginning?</a:t>
-            </a:r>
-            <a:endParaRPr lang="en-US" sz="1500" dirty="0"/>
-          </a:p>
-          <a:p>
-            <a:pPr indent="0" marL="0">
-              <a:buNone/>
-            </a:pPr>
-            <a:r>
-              <a:rPr lang="en-US" sz="1500" dirty="0">
-                <a:solidFill>
-                  <a:srgbClr val="1E293B"/>
-                </a:solidFill>
-                <a:latin typeface="Calibri" pitchFamily="34" charset="0"/>
-                <a:ea typeface="Calibri" pitchFamily="34" charset="-122"/>
-                <a:cs typeface="Calibri" pitchFamily="34" charset="-120"/>
-              </a:rPr>
-              <a:t>•  Which scene would you read aloud to someone who had never heard the book?</a:t>
+              <a:t>•  Practice your scene. What emotion will you read into each character's lines?</a:t>
             </a:r>
             <a:endParaRPr lang="en-US" sz="1500" dirty="0"/>
           </a:p>
